--- a/docs/pitch-deck/pulse-hdi.pptx
+++ b/docs/pitch-deck/pulse-hdi.pptx
@@ -6156,7 +6156,7 @@
                 </a:solidFill>
                 <a:latin typeface="Menlo"/>
               </a:rPr>
-              <a:t>Redesigned Executive view · 2 active incidents state</a:t>
+              <a:t>Executive view · rendered at 1920x1080 · 2 active incidents state</a:t>
             </a:r>
           </a:p>
         </p:txBody>

--- a/docs/pitch-deck/pulse-hdi.pptx
+++ b/docs/pitch-deck/pulse-hdi.pptx
@@ -6156,7 +6156,7 @@
                 </a:solidFill>
                 <a:latin typeface="Menlo"/>
               </a:rPr>
-              <a:t>Redesigned Executive view · 2 active incidents state</a:t>
+              <a:t>Executive view · rendered at 1920x1080 · 2 active incidents</a:t>
             </a:r>
           </a:p>
         </p:txBody>
